--- a/public/fun/pack/pptx/familypro/가족소개프리미엄_10_반려동물과함께_올리브샴페인.pptx
+++ b/public/fun/pack/pptx/familypro/가족소개프리미엄_10_반려동물과함께_올리브샴페인.pptx
@@ -113,12 +113,12 @@
   <p:extLst>
     <p:ext uri="{521415D9-36F7-43E2-AB2F-B90AF26B5E84}">
       <p14:sectionLst xmlns:p14="http://schemas.microsoft.com/office/powerpoint/2010/main">
-        <p14:section name="시작" id="{929A9FB3-F87A-40C6-8CD9-D8AB95660C7D}">
+        <p14:section name="시작" id="{3E34FE4F-D3C0-4046-AB4B-A59BCF465AFF}">
           <p14:sldIdLst>
             <p14:sldId id="256"/>
           </p14:sldIdLst>
         </p14:section>
-        <p14:section name="본문" id="{17557949-DC4F-42D7-B4B1-B7C7DDD1FFD0}">
+        <p14:section name="본문" id="{933C0739-D0D4-4159-B59A-52101E7DD0F6}">
           <p14:sldIdLst>
             <p14:sldId id="257"/>
             <p14:sldId id="258"/>
@@ -127,7 +127,7 @@
             <p14:sldId id="261"/>
           </p14:sldIdLst>
         </p14:section>
-        <p14:section name="마무리" id="{F6295767-5F53-4439-9FBE-BEDCDC105371}">
+        <p14:section name="마무리" id="{53FADB0C-60EC-46C4-9897-53525FC2895B}">
           <p14:sldIdLst>
             <p14:sldId id="262"/>
           </p14:sldIdLst>
@@ -2892,7 +2892,7 @@
             </a:lvl1pPr>
           </a:lstStyle>
           <a:p>
-            <a:fld id="{5D9093EE-A057-4174-87B9-8438CE7DA24A}" type="slidenum">
+            <a:fld id="{DA161832-F8B2-4C4C-AF05-C0CAB6394645}" type="slidenum">
               <a:rPr lang="en-US"/>
               <a:t>‹#›</a:t>
             </a:fld>
@@ -4882,7 +4882,7 @@
             </a:lvl1pPr>
           </a:lstStyle>
           <a:p>
-            <a:fld id="{F41C07DF-D4A9-44BC-B2D1-F66BF32241E4}" type="slidenum">
+            <a:fld id="{12FDC8E1-0BBA-4539-9E93-DF876ACD14BB}" type="slidenum">
               <a:rPr lang="en-US"/>
               <a:t>‹#›</a:t>
             </a:fld>
@@ -5519,7 +5519,7 @@
             </a:lvl1pPr>
           </a:lstStyle>
           <a:p>
-            <a:fld id="{9CB7AF76-5FCF-447D-93D0-4B5A17D42AF5}" type="slidenum">
+            <a:fld id="{318A6AAE-3ABB-45B8-B9F8-DD27DB9271FA}" type="slidenum">
               <a:rPr lang="en-US"/>
               <a:t>‹#›</a:t>
             </a:fld>
@@ -6380,7 +6380,7 @@
           <a:p>
             <a:r>
               <a:rPr lang="ko-KR"/>
-              <a:t>반려동물과 함께 · 0000. 00. 00</a:t>
+              <a:t>반려동물과 함께 · 날짜 입력</a:t>
             </a:r>
           </a:p>
         </p:txBody>
@@ -6672,7 +6672,7 @@
           <a:bodyPr/>
           <a:lstStyle/>
           <a:p>
-            <a:fld id="{39B6D244-6285-48A7-B485-F9C5605B311F}" type="slidenum">
+            <a:fld id="{8DA27158-6FEF-4066-82D2-FB2370B250C9}" type="slidenum">
               <a:rPr lang="en-US"/>
               <a:t>‹#›</a:t>
             </a:fld>
@@ -7306,7 +7306,7 @@
           <a:bodyPr/>
           <a:lstStyle/>
           <a:p>
-            <a:fld id="{E8C3931F-FE93-495F-80C6-ACAFD5F5E6D9}" type="slidenum">
+            <a:fld id="{1AF55BB5-0855-4F71-BCA7-8DE24147AF28}" type="slidenum">
               <a:rPr lang="en-US"/>
               <a:t>‹#›</a:t>
             </a:fld>
@@ -8281,7 +8281,7 @@
           <a:bodyPr/>
           <a:lstStyle/>
           <a:p>
-            <a:fld id="{4AB47A90-9EFF-4E82-9560-6BBB3CDE685C}" type="slidenum">
+            <a:fld id="{EEE54EC4-E07E-4B53-B362-CBE1ED2FD3D2}" type="slidenum">
               <a:rPr lang="en-US"/>
               <a:t>‹#›</a:t>
             </a:fld>
@@ -9629,7 +9629,7 @@
           <a:bodyPr/>
           <a:lstStyle/>
           <a:p>
-            <a:fld id="{562845C0-E4DD-4143-9C75-C683F4A6B64B}" type="slidenum">
+            <a:fld id="{6315AA8D-33AC-413D-994D-18864AA652BD}" type="slidenum">
               <a:rPr lang="en-US"/>
               <a:t>‹#›</a:t>
             </a:fld>
@@ -9717,7 +9717,7 @@
           <a:bodyPr/>
           <a:lstStyle/>
           <a:p>
-            <a:fld id="{8BF66E28-1131-465D-A496-45439255FB54}" type="slidenum">
+            <a:fld id="{25AC0DC7-0474-468D-8179-96C87C36A833}" type="slidenum">
               <a:rPr lang="en-US"/>
               <a:t>‹#›</a:t>
             </a:fld>
